--- a/slides/ModuleE_VirtualNetworking_EN.pptx
+++ b/slides/ModuleE_VirtualNetworking_EN.pptx
@@ -6,7 +6,7 @@
   </p:sldMasterIdLst>
   <p:sldIdLst>
     <p:sldId id="256" r:id="rId7"/>
-    <p:sldId id="257" r:id="rId8"/>
+    <p:sldId id="257" r:id="rId9"/>
     <p:sldId id="258" r:id="rId10"/>
     <p:sldId id="259" r:id="rId11"/>
     <p:sldId id="260" r:id="rId12"/>
@@ -528,7 +528,31 @@
           <a:lstStyle/>
           <a:p>
             <a:r>
-              <a:t>[EXT] 45 min</a:t>
+              <a:t>Welcome. In this module we will work through Module E — Virtual Networking.</a:t>
+            </a:r>
+          </a:p>
+          <a:p/>
+          <a:p>
+            <a:r>
+              <a:t>Ch.5 · Extension · VM {{VM_IP}} · OPTIONAL tier</a:t>
+            </a:r>
+          </a:p>
+          <a:p/>
+          <a:p>
+            <a:r>
+              <a:t>The session alternates theory from the book with live exercises on the Stack4Things lab VM. Replace the placeholder IP with the address of the machine you are using.</a:t>
+            </a:r>
+          </a:p>
+          <a:p/>
+          <a:p>
+            <a:r>
+              <a:t>Extension · Ch.5 — Virtual Networking · optional if Neutron incomplete.</a:t>
+            </a:r>
+          </a:p>
+          <a:p/>
+          <a:p>
+            <a:r>
+              <a:t>When you're ready, advance to the first section.</a:t>
             </a:r>
           </a:p>
         </p:txBody>
@@ -598,7 +622,31 @@
           <a:lstStyle/>
           <a:p>
             <a:r>
-              <a:t>[EXT] 45 min</a:t>
+              <a:t>In this slide we cover S4T NV use cases from the book (Ch.5). This material is covered in Ch.5 § use cases · fig:chap05:use-cases · fig:chap05:use-case-personal.</a:t>
+            </a:r>
+          </a:p>
+          <a:p/>
+          <a:p>
+            <a:r>
+              <a:t>First, regarding partitioning, split devices on one LAN into separate VNs — e.g. departments in a smart building. Next, regarding cross-network, connect geo-distributed boards without VPN configuration on edge routers.</a:t>
+            </a:r>
+          </a:p>
+          <a:p/>
+          <a:p>
+            <a:r>
+              <a:t>By contrast, regarding cloud extension, add OpenStack VMs to the same VN as edge sensors for storage and analytics. We should also consider that regarding personal devices, smartphones/tablets join VN — static overlay IP survives WiFi↔4G handoff.</a:t>
+            </a:r>
+          </a:p>
+          <a:p/>
+          <a:p>
+            <a:r>
+              <a:t>Another key point is that Hybrid VNs combine all patterns — countless topologies for application-specific requirements. Furthermore, AllJoyn requires same broadcast domain; S4T NV crosses NAT and subnet boundaries.</a:t>
+            </a:r>
+          </a:p>
+          <a:p/>
+          <a:p>
+            <a:r>
+              <a:t>I'll pause here for questions, then we'll continue.</a:t>
             </a:r>
           </a:p>
         </p:txBody>
@@ -668,7 +716,7 @@
           <a:lstStyle/>
           <a:p>
             <a:r>
-              <a:t>[EXT] 45 min</a:t>
+              <a:t>Please look at the diagram on screen: Attach port workflow. Describe the main boxes and arrows. Relate each element to a Docker service or API you have already seen. In particular, note the following: Horizon/API → IoTronic → WAgent → board virtual interface. Take a few seconds to orient before we continue.</a:t>
             </a:r>
           </a:p>
         </p:txBody>
@@ -738,7 +786,31 @@
           <a:lstStyle/>
           <a:p>
             <a:r>
-              <a:t>[EXT] 45 min</a:t>
+              <a:t>On this slide, Module E — learning objectives.</a:t>
+            </a:r>
+          </a:p>
+          <a:p/>
+          <a:p>
+            <a:r>
+              <a:t>First, Understand Ch.5 virtual networking theory and IoTronic ports API. Next, Execute attach-port.sh helper script against live lab Conductor.</a:t>
+            </a:r>
+          </a:p>
+          <a:p/>
+          <a:p>
+            <a:r>
+              <a:t>By contrast, Inspect WAgent logs for orchestration evidence. We should also consider that Articulate VN vs WSTUN difference (network overlay vs HTTP tunnel).</a:t>
+            </a:r>
+          </a:p>
+          <a:p/>
+          <a:p>
+            <a:r>
+              <a:t>Another key point is that Pass validate-lab-vn.sh where Neutron backend permits.</a:t>
+            </a:r>
+          </a:p>
+          <a:p/>
+          <a:p>
+            <a:r>
+              <a:t>If these objectives are clear, we can proceed.</a:t>
             </a:r>
           </a:p>
         </p:txBody>
@@ -808,7 +880,37 @@
           <a:lstStyle/>
           <a:p>
             <a:r>
-              <a:t>[EXT] 45 min</a:t>
+              <a:t>In this demonstration, What this module demonstrates — demo goals.</a:t>
+            </a:r>
+          </a:p>
+          <a:p/>
+          <a:p>
+            <a:r>
+              <a:t>First, Operator can request virtual port attachment via REST API on live Conductor. Next, WAgent logs show orchestration attempt even if Neutron L3 backend is limited in Docker.</a:t>
+            </a:r>
+          </a:p>
+          <a:p/>
+          <a:p>
+            <a:r>
+              <a:t>By contrast, Students understand production attach-port workflow before field deployment. We should also consider that Board appears as network participant — not just HTTP endpoint behind NAT.</a:t>
+            </a:r>
+          </a:p>
+          <a:p/>
+          <a:p>
+            <a:r>
+              <a:t>Another key point is that Foundation for SLICES multi-site experiments (Ch.10–11) using Neutron overlays. Furthermore, Optional module — skip gracefully if short on time without blocking other modules.</a:t>
+            </a:r>
+          </a:p>
+          <a:p/>
+          <a:p>
+            <a:r>
+              <a:t>Check that your screen matches what we showed before moving on.</a:t>
+            </a:r>
+          </a:p>
+          <a:p/>
+          <a:p>
+            <a:r>
+              <a:t>Session timing — Module E — 45-minute timeline (OPTIONAL):</a:t>
             </a:r>
           </a:p>
         </p:txBody>
@@ -878,7 +980,13 @@
           <a:lstStyle/>
           <a:p>
             <a:r>
-              <a:t>[EXT] 6 min</a:t>
+              <a:t>We now begin a new section: Lab: explore boards and ports. attach-port.sh helper scripts. In the next slides, listen for whether we are in theory mode or hands-on mode, and open your terminal when the slides turn to lab work.</a:t>
+            </a:r>
+          </a:p>
+          <a:p/>
+          <a:p>
+            <a:r>
+              <a:t>Instructor timing (title): Hands-on — explore boards and ports</a:t>
             </a:r>
           </a:p>
         </p:txBody>
@@ -948,7 +1056,31 @@
           <a:lstStyle/>
           <a:p>
             <a:r>
-              <a:t>[EXT] 45 min</a:t>
+              <a:t>Now we move to the hands-on part: List boards and existing ports. Open your lab VM and follow along.</a:t>
+            </a:r>
+          </a:p>
+          <a:p/>
+          <a:p>
+            <a:r>
+              <a:t>Please run the following command on your VM: cd training. Wait until you see a sensible result before continuing. Please run the following command on your VM: ./experiments/virtual-networking/attach-port.sh boards. Wait until you see a sensible result before continuing.</a:t>
+            </a:r>
+          </a:p>
+          <a:p/>
+          <a:p>
+            <a:r>
+              <a:t>Please run the following command on your VM: ./experiments/virtual-networking/attach-port.sh list. Wait until you see a sensible result before continuing. We should also consider that Note Active board UUID(s) and any existing port attachments.</a:t>
+            </a:r>
+          </a:p>
+          <a:p/>
+          <a:p>
+            <a:r>
+              <a:t>Raise your hand if you're stuck — we'll wait until most of you are done.</a:t>
+            </a:r>
+          </a:p>
+          <a:p/>
+          <a:p>
+            <a:r>
+              <a:t>Instructor timing (title): Step 1 — List boards and existing ports</a:t>
             </a:r>
           </a:p>
         </p:txBody>
@@ -1018,7 +1150,7 @@
           <a:lstStyle/>
           <a:p>
             <a:r>
-              <a:t>[EXT] 45 min</a:t>
+              <a:t>Please look at the screenshot on screen: Horizon IoT — Boards (attach port context). Walk the class through what they see in the interface. Connect each panel and button to a component we already deployed in the stack. In particular, note the following: http://{{VM_IP}}/horizon/iot/ · login admin / s4t · select Active board. Take a few seconds to orient before we continue.</a:t>
             </a:r>
           </a:p>
         </p:txBody>
@@ -1088,7 +1220,31 @@
           <a:lstStyle/>
           <a:p>
             <a:r>
-              <a:t>[EXT] 45 min</a:t>
+              <a:t>In this slide we cover attach-port.sh script internals. This material is covered in training/experiments/virtual-networking/attach-port.sh.</a:t>
+            </a:r>
+          </a:p>
+          <a:p/>
+          <a:p>
+            <a:r>
+              <a:t>First, Script wraps IoTronic REST API with lab-friendly output formatting. Next, regarding boards subcommand, GET /v1/boards/ — filters Active boards.</a:t>
+            </a:r>
+          </a:p>
+          <a:p/>
+          <a:p>
+            <a:r>
+              <a:t>By contrast, regarding list subcommand, GET /v1/boards/{uuid}/ports/ — shows existing VIF attachments. We should also consider that regarding uses conductor at http, //{{VM_IP}}:8812 — same endpoint as Module A API checks.</a:t>
+            </a:r>
+          </a:p>
+          <a:p/>
+          <a:p>
+            <a:r>
+              <a:t>Another key point is that regarding token acquisition, script reads from env or prompts — see script header for details. Furthermore, Safe to re-run list after attach to confirm new port appears in response JSON.</a:t>
+            </a:r>
+          </a:p>
+          <a:p/>
+          <a:p>
+            <a:r>
+              <a:t>I'll pause here for questions, then we'll continue.</a:t>
             </a:r>
           </a:p>
         </p:txBody>
@@ -1158,12 +1314,13 @@
           <a:lstStyle/>
           <a:p>
             <a:r>
-              <a:t>[EXT] 45 min</a:t>
-            </a:r>
-          </a:p>
-          <a:p>
-            <a:r>
-              <a:t>Replace BOARD_UUID from boards listing · NETWORK_UUID from Neutron/Horizon if available</a:t>
+              <a:t>We now begin a new section: Lab: attach port via API. POST when network UUID known. In the next slides, listen for whether we are in theory mode or hands-on mode, and open your terminal when the slides turn to lab work.</a:t>
+            </a:r>
+          </a:p>
+          <a:p/>
+          <a:p>
+            <a:r>
+              <a:t>Instructor timing (title): Hands-on — attach port via API</a:t>
             </a:r>
           </a:p>
         </p:txBody>
@@ -1233,7 +1390,31 @@
           <a:lstStyle/>
           <a:p>
             <a:r>
-              <a:t>[EXT] 45 min</a:t>
+              <a:t>On this slide we walk through the code for Attach port API call.</a:t>
+            </a:r>
+          </a:p>
+          <a:p/>
+          <a:p>
+            <a:r>
+              <a:t>Scroll slowly through the listing on screen while I explain each part.</a:t>
+            </a:r>
+          </a:p>
+          <a:p/>
+          <a:p>
+            <a:r>
+              <a:t>Point out the imports, the class definition, and the run method. Students will adapt this template in the lab rather than writing from scratch.</a:t>
+            </a:r>
+          </a:p>
+          <a:p/>
+          <a:p>
+            <a:r>
+              <a:t>After reviewing the code, we'll apply it in the practical exercise.</a:t>
+            </a:r>
+          </a:p>
+          <a:p/>
+          <a:p>
+            <a:r>
+              <a:t>Instructor timing (title): Step 2 — Attach port API call</a:t>
             </a:r>
           </a:p>
         </p:txBody>
@@ -1303,7 +1484,7 @@
           <a:lstStyle/>
           <a:p>
             <a:r>
-              <a:t>[EXT] 45 min</a:t>
+              <a:t>We now begin a new section: Network virtualization theory. Ch.5 — Neutron + IoTronic ports before the lab. In the next slides, listen for whether we are in theory mode or hands-on mode, and open your terminal when the slides turn to lab work.</a:t>
             </a:r>
           </a:p>
         </p:txBody>
@@ -1373,7 +1554,31 @@
           <a:lstStyle/>
           <a:p>
             <a:r>
-              <a:t>[EXT] 45 min</a:t>
+              <a:t>In this slide we cover Expected API response fields (Ch.5). This material is covered in Ch.5 · ports API response schema.</a:t>
+            </a:r>
+          </a:p>
+          <a:p/>
+          <a:p>
+            <a:r>
+              <a:t>First, regarding vif_name, logical interface identifier assigned by IoTronic/Neutron. Next, regarding ip address, overlay IP reachable within the Neutron network context.</a:t>
+            </a:r>
+          </a:p>
+          <a:p/>
+          <a:p>
+            <a:r>
+              <a:t>By contrast, regarding mac_add, hardware address for L2 operations on the overlay segment. We should also consider that regarding empty or error response, neutron backend may not be fully wired in Docker lab.</a:t>
+            </a:r>
+          </a:p>
+          <a:p/>
+          <a:p>
+            <a:r>
+              <a:t>Another key point is that Partial success still demonstrates API contract students will use in production. Furthermore, Compare response schema with Ch.5 API tables in the book listing.</a:t>
+            </a:r>
+          </a:p>
+          <a:p/>
+          <a:p>
+            <a:r>
+              <a:t>I'll pause here for questions, then we'll continue.</a:t>
             </a:r>
           </a:p>
         </p:txBody>
@@ -1443,7 +1648,31 @@
           <a:lstStyle/>
           <a:p>
             <a:r>
-              <a:t>[EXT] 6 min</a:t>
+              <a:t>In this slide we cover TUN/TAP and edge-side networking (Ch.5). This material is covered in Ch.5 · edge virtual interface · TUN/TAP.</a:t>
+            </a:r>
+          </a:p>
+          <a:p/>
+          <a:p>
+            <a:r>
+              <a:t>First, Virtual interfaces on board appear as tun/tap devices in Linux network stack. Next, Ip link show on board container reveals new interface after successful attach.</a:t>
+            </a:r>
+          </a:p>
+          <a:p/>
+          <a:p>
+            <a:r>
+              <a:t>By contrast, Applications bind to assigned overlay IP — no change to physical NIC configuration. We should also consider that Edge routing tables may need update for multi-homed board scenarios (advanced).</a:t>
+            </a:r>
+          </a:p>
+          <a:p/>
+          <a:p>
+            <a:r>
+              <a:t>Another key point is that regarding wstun (module f) solves different problem, HTTP service exposure via NAT traversal. Furthermore, VN + WSTUN complement each other in full S4T production deployments.</a:t>
+            </a:r>
+          </a:p>
+          <a:p/>
+          <a:p>
+            <a:r>
+              <a:t>I'll pause here for questions, then we'll continue.</a:t>
             </a:r>
           </a:p>
         </p:txBody>
@@ -1513,7 +1742,36 @@
           <a:lstStyle/>
           <a:p>
             <a:r>
-              <a:t>[EXT] 45 min</a:t>
+              <a:t>Now we move to the hands-on part: Verify WAgent logs. Open your lab VM and follow along.</a:t>
+            </a:r>
+          </a:p>
+          <a:p/>
+          <a:p>
+            <a:r>
+              <a:t>Please run the following command on your VM: docker logs iotronic-wagent 2&gt;&amp;1 | tail -30. Wait until you see a sensible result before continuing. Next, Look for port attach / VIF configuration messages.</a:t>
+            </a:r>
+          </a:p>
+          <a:p/>
+          <a:p>
+            <a:r>
+              <a:t>Raise your hand if you're stuck — we'll wait until most of you are done.</a:t>
+            </a:r>
+          </a:p>
+          <a:p/>
+          <a:p>
+            <a:r>
+              <a:t>Instructor timing (title): Step 3 — Verify WAgent logs</a:t>
+            </a:r>
+          </a:p>
+          <a:p/>
+          <a:p>
+            <a:r>
+              <a:t>Instructor cues:</a:t>
+            </a:r>
+          </a:p>
+          <a:p>
+            <a:r>
+              <a:t>• If no Neutron network UUID available: document API attempt for instructor review</a:t>
             </a:r>
           </a:p>
         </p:txBody>
@@ -1583,7 +1841,31 @@
           <a:lstStyle/>
           <a:p>
             <a:r>
-              <a:t>[EXT] 45 min</a:t>
+              <a:t>In this slide we cover VN vs WSTUN — comparison table (Ch.5 vs Ch.14). This material is covered in Ch.5 · Ch.14 §14.3 · Module F cross-reference.</a:t>
+            </a:r>
+          </a:p>
+          <a:p/>
+          <a:p>
+            <a:r>
+              <a:t>First, regarding vn (this module), L2/L3 overlay — board gets IP on Neutron network. Next, regarding wstun (module f), L7 reverse tunnel — board HTTP service exposed on public port.</a:t>
+            </a:r>
+          </a:p>
+          <a:p/>
+          <a:p>
+            <a:r>
+              <a:t>By contrast, regarding vn use case, cloud VM pings board overlay IP; microservice-to-sensor direct TCP. We should also consider that regarding wstun use case, curl http://{{VM_IP}}:50002/ reaches nginx on board port 50000.</a:t>
+            </a:r>
+          </a:p>
+          <a:p/>
+          <a:p>
+            <a:r>
+              <a:t>Another key point is that regarding production, both enabled simultaneously for different application patterns. Furthermore, regarding lab docker stack, WSTUN fully functional; VN demonstrates API + WAgent workflow.</a:t>
+            </a:r>
+          </a:p>
+          <a:p/>
+          <a:p>
+            <a:r>
+              <a:t>I'll pause here for questions, then we'll continue.</a:t>
             </a:r>
           </a:p>
         </p:txBody>
@@ -1653,7 +1935,7 @@
           <a:lstStyle/>
           <a:p>
             <a:r>
-              <a:t>[EXT] 6 min</a:t>
+              <a:t>We now begin a new section: Validate &amp; further reading. Production Neutron requirements. In the next slides, listen for whether we are in theory mode or hands-on mode, and open your terminal when the slides turn to lab work.</a:t>
             </a:r>
           </a:p>
         </p:txBody>
@@ -1723,7 +2005,25 @@
           <a:lstStyle/>
           <a:p>
             <a:r>
-              <a:t>[EXT] 45 min</a:t>
+              <a:t>Now we move to the hands-on part: Validate VN module. Open your lab VM and follow along.</a:t>
+            </a:r>
+          </a:p>
+          <a:p/>
+          <a:p>
+            <a:r>
+              <a:t>Please run the following command on your VM: cd training &amp;&amp; ./validate-lab-vn.sh. Wait until you see a sensible result before continuing. Next, Script checks API reachability and WAgent container health.</a:t>
+            </a:r>
+          </a:p>
+          <a:p/>
+          <a:p>
+            <a:r>
+              <a:t>Raise your hand if you're stuck — we'll wait until most of you are done.</a:t>
+            </a:r>
+          </a:p>
+          <a:p/>
+          <a:p>
+            <a:r>
+              <a:t>Instructor timing (title): Step 4 — Validate VN module</a:t>
             </a:r>
           </a:p>
         </p:txBody>
@@ -1793,7 +2093,125 @@
           <a:lstStyle/>
           <a:p>
             <a:r>
-              <a:t>[EXT] 45 min</a:t>
+              <a:t>In this slide we cover Production deployment requirements (Ch.5). This material is covered in Ch.5 · production checklist · ch05 repo.</a:t>
+            </a:r>
+          </a:p>
+          <a:p/>
+          <a:p>
+            <a:r>
+              <a:t>First, Full OpenStack Neutron with ML2 plugin and network agent on compute nodes. Next, IoTronic Conductor + WAgent deployed as OpenStack services (not Docker lab compose).</a:t>
+            </a:r>
+          </a:p>
+          <a:p/>
+          <a:p>
+            <a:r>
+              <a:t>By contrast, Board Lightning-Rod agent version compatible with IoTronic ports API version. We should also consider that Network UUIDs managed via Horizon Network panel or neutron CLI.</a:t>
+            </a:r>
+          </a:p>
+          <a:p/>
+          <a:p>
+            <a:r>
+              <a:t>Another key point is that SLICES RI testbeds (Ch.10) provide production-grade Neutron for experimenters. Furthermore, regarding reference repo, github.com/AssemblingSmartCPS/ch05 — Neutron port specs.</a:t>
+            </a:r>
+          </a:p>
+          <a:p/>
+          <a:p>
+            <a:r>
+              <a:t>I'll pause here for questions, then we'll continue.</a:t>
+            </a:r>
+          </a:p>
+        </p:txBody>
+      </p:sp>
+      <p:sp>
+        <p:nvSpPr>
+          <p:cNvPr id="4" name="Slide Number Placeholder 3"/>
+          <p:cNvSpPr>
+            <a:spLocks noGrp="1"/>
+          </p:cNvSpPr>
+          <p:nvPr>
+            <p:ph type="sldNum" idx="5" sz="quarter"/>
+          </p:nvPr>
+        </p:nvSpPr>
+        <p:spPr/>
+      </p:sp>
+    </p:spTree>
+  </p:cSld>
+  <p:clrMapOvr>
+    <a:masterClrMapping/>
+  </p:clrMapOvr>
+</p:notes>
+</file>
+
+<file path=ppt/notesSlides/notesSlide27.xml><?xml version="1.0" encoding="utf-8"?>
+<p:notes xmlns:a="http://schemas.openxmlformats.org/drawingml/2006/main" xmlns:p="http://schemas.openxmlformats.org/presentationml/2006/main" xmlns:r="http://schemas.openxmlformats.org/officeDocument/2006/relationships">
+  <p:cSld>
+    <p:spTree>
+      <p:nvGrpSpPr>
+        <p:cNvPr id="1" name=""/>
+        <p:cNvGrpSpPr/>
+        <p:nvPr/>
+      </p:nvGrpSpPr>
+      <p:grpSpPr>
+        <a:xfrm>
+          <a:off x="0" y="0"/>
+          <a:ext cx="0" cy="0"/>
+          <a:chOff x="0" y="0"/>
+          <a:chExt cx="0" cy="0"/>
+        </a:xfrm>
+      </p:grpSpPr>
+      <p:sp>
+        <p:nvSpPr>
+          <p:cNvPr id="2" name="Slide Image Placeholder 1"/>
+          <p:cNvSpPr>
+            <a:spLocks noGrp="1"/>
+          </p:cNvSpPr>
+          <p:nvPr>
+            <p:ph type="sldImg" idx="2"/>
+          </p:nvPr>
+        </p:nvSpPr>
+        <p:spPr/>
+      </p:sp>
+      <p:sp>
+        <p:nvSpPr>
+          <p:cNvPr id="3" name="Notes Placeholder 2"/>
+          <p:cNvSpPr>
+            <a:spLocks noGrp="1"/>
+          </p:cNvSpPr>
+          <p:nvPr>
+            <p:ph type="body" idx="3" sz="quarter"/>
+          </p:nvPr>
+        </p:nvSpPr>
+        <p:spPr/>
+        <p:txBody>
+          <a:bodyPr/>
+          <a:lstStyle/>
+          <a:p>
+            <a:r>
+              <a:t>On this slide, Module E checklist &amp; reference.</a:t>
+            </a:r>
+          </a:p>
+          <a:p/>
+          <a:p>
+            <a:r>
+              <a:t>First, □ attach-port.sh boards lists Active board from Module A. Next, □ Port attach API call attempted (or documented why Neutron UUID unavailable).</a:t>
+            </a:r>
+          </a:p>
+          <a:p/>
+          <a:p>
+            <a:r>
+              <a:t>By contrast, □ WAgent logs inspected for orchestration messages. We should also consider that □ Student can explain VN vs WSTUN difference.</a:t>
+            </a:r>
+          </a:p>
+          <a:p/>
+          <a:p>
+            <a:r>
+              <a:t>Another key point is that regarding reference, book Ch.5 tables · github.com/AssemblingSmartCPS/ch05.</a:t>
+            </a:r>
+          </a:p>
+          <a:p/>
+          <a:p>
+            <a:r>
+              <a:t>If these objectives are clear, we can proceed.</a:t>
             </a:r>
           </a:p>
         </p:txBody>
@@ -1863,7 +2281,31 @@
           <a:lstStyle/>
           <a:p>
             <a:r>
-              <a:t>[EXT] 45 min</a:t>
+              <a:t>In this slide we cover Problem: connecting cloud and edge (Ch.5). This material is covered in Ch.5 · Network virtualization in IoT · chapter abstract.</a:t>
+            </a:r>
+          </a:p>
+          <a:p/>
+          <a:p>
+            <a:r>
+              <a:t>First, IoT boards sit behind NAT, firewalls, and heterogeneous LAN topologies. Next, Cloud applications in VMs need logical connectivity to edge devices and sensors.</a:t>
+            </a:r>
+          </a:p>
+          <a:p/>
+          <a:p>
+            <a:r>
+              <a:t>By contrast, regarding network virtualization, overlay networks independent of physical wiring. We should also consider that Stack4Things extends OpenStack Neutron toward edge IoT nodes via IoTronic.</a:t>
+            </a:r>
+          </a:p>
+          <a:p/>
+          <a:p>
+            <a:r>
+              <a:t>Another key point is that regarding goal, treat remote boards as first-class network citizens in the cloud overlay. Furthermore, Complements WSTUN (Module F) which solves HTTP service exposure, not L2/L3 overlay.</a:t>
+            </a:r>
+          </a:p>
+          <a:p/>
+          <a:p>
+            <a:r>
+              <a:t>I'll pause here for questions, then we'll continue.</a:t>
             </a:r>
           </a:p>
         </p:txBody>
@@ -1933,7 +2375,31 @@
           <a:lstStyle/>
           <a:p>
             <a:r>
-              <a:t>[EXT] 45 min</a:t>
+              <a:t>In this slide we cover OpenStack Neutron recap for IoT context (Ch.5). This material is covered in Ch.5 § OpenStack networking · Neutron architecture.</a:t>
+            </a:r>
+          </a:p>
+          <a:p/>
+          <a:p>
+            <a:r>
+              <a:t>First, Neutron manages virtual networks, subnets, routers, security groups in OpenStack. Next, Standard cloud VMs attach to Neutron networks via virtual interfaces (VIFs).</a:t>
+            </a:r>
+          </a:p>
+          <a:p/>
+          <a:p>
+            <a:r>
+              <a:t>By contrast, regarding iotronic ports api extends this model, boards receive VIFs on overlay networks. We should also consider that WAgent (Worker Agent) on cloud side coordinates tunnel/port setup with edge LR agent.</a:t>
+            </a:r>
+          </a:p>
+          <a:p/>
+          <a:p>
+            <a:r>
+              <a:t>Another key point is that regarding production, full Neutron L2/L3 with ML2 plugin; Docker lab: API workflow demo only. Furthermore, Book tables list IoTronic networking REST endpoints with request/response schemas.</a:t>
+            </a:r>
+          </a:p>
+          <a:p/>
+          <a:p>
+            <a:r>
+              <a:t>I'll pause here for questions, then we'll continue.</a:t>
             </a:r>
           </a:p>
         </p:txBody>
@@ -2003,7 +2469,31 @@
           <a:lstStyle/>
           <a:p>
             <a:r>
-              <a:t>[EXT] 45 min</a:t>
+              <a:t>In this slide we cover Virtual ports &amp; VIF abstraction (Ch.5). This material is covered in Ch.5 · IoTronic networking API · attach port listing.</a:t>
+            </a:r>
+          </a:p>
+          <a:p/>
+          <a:p>
+            <a:r>
+              <a:t>First, POST /v1/boards/{uuid}/ports/ attaches virtual network interface to registered board. Next, Response JSON includes VIF_name, ip address, MAC_add — logical identity on overlay.</a:t>
+            </a:r>
+          </a:p>
+          <a:p/>
+          <a:p>
+            <a:r>
+              <a:t>By contrast, regarding board-side, virtual interface appears in Linux network stack (tun/tap device). We should also consider that Applications on board bind to assigned overlay IP without physical NIC changes.</a:t>
+            </a:r>
+          </a:p>
+          <a:p/>
+          <a:p>
+            <a:r>
+              <a:t>Another key point is that regarding cloud-side, other VMs on same Neutron network reach board via overlay routing. Furthermore, Enables peer-to-peer cloud↔edge communication for latency-sensitive workloads.</a:t>
+            </a:r>
+          </a:p>
+          <a:p/>
+          <a:p>
+            <a:r>
+              <a:t>I'll pause here for questions, then we'll continue.</a:t>
             </a:r>
           </a:p>
         </p:txBody>
@@ -2073,7 +2563,31 @@
           <a:lstStyle/>
           <a:p>
             <a:r>
-              <a:t>[EXT] 45 min</a:t>
+              <a:t>In this slide we cover WAgent orchestration role (Ch.5 + Ch.13). This material is covered in Ch.5 · WAgent · Ch.13 docker-compose service list.</a:t>
+            </a:r>
+          </a:p>
+          <a:p/>
+          <a:p>
+            <a:r>
+              <a:t>First, WAgent container (iotronic-wagent) runs alongside Conductor in cloud stack. Next, Receives port attach requests from IoTronic, then configures tunnel/VIF on cloud side.</a:t>
+            </a:r>
+          </a:p>
+          <a:p/>
+          <a:p>
+            <a:r>
+              <a:t>By contrast, Coordinates with Lightning-Rod agent on board for edge-side interface creation. We should also consider that Logs in docker logs iotronic-wagent show attach attempt and backend response.</a:t>
+            </a:r>
+          </a:p>
+          <a:p/>
+          <a:p>
+            <a:r>
+              <a:t>Another key point is that regarding if neutron backend unavailable, API accepts request but L3 may not fully provision. Furthermore, regarding lab value, understand book workflow before production OpenStack deployment.</a:t>
+            </a:r>
+          </a:p>
+          <a:p/>
+          <a:p>
+            <a:r>
+              <a:t>I'll pause here for questions, then we'll continue.</a:t>
             </a:r>
           </a:p>
         </p:txBody>
@@ -2143,7 +2657,31 @@
           <a:lstStyle/>
           <a:p>
             <a:r>
-              <a:t>[EXT] 45 min</a:t>
+              <a:t>In this slide we cover I/Ocloud networking context (Ch.4–5 bridge). This material is covered in Ch.4 I/Ocloud + Ch.5 VN · fig:chap05:vn-workflow.</a:t>
+            </a:r>
+          </a:p>
+          <a:p/>
+          <a:p>
+            <a:r>
+              <a:t>First, Virtual Nodes in cloud can participate in same overlay as physical boards. Next, Designate provides DNS naming; Neutron provides topology; IoTronic binds boards.</a:t>
+            </a:r>
+          </a:p>
+          <a:p/>
+          <a:p>
+            <a:r>
+              <a:t>By contrast, regarding full production, multi-site SLICES experiments span Neutron networks (Ch.10–11). We should also consider that VN enables cloud microservices to push/pull data directly to edge sensors.</a:t>
+            </a:r>
+          </a:p>
+          <a:p/>
+          <a:p>
+            <a:r>
+              <a:t>Another key point is that regarding different from module f wstun, VN is network-layer; WSTUN is application-layer tunnel. Furthermore, Both coexist in complete S4T deployments for different connectivity patterns.</a:t>
+            </a:r>
+          </a:p>
+          <a:p/>
+          <a:p>
+            <a:r>
+              <a:t>I'll pause here for questions, then we'll continue.</a:t>
             </a:r>
           </a:p>
         </p:txBody>
@@ -2213,7 +2751,31 @@
           <a:lstStyle/>
           <a:p>
             <a:r>
-              <a:t>[EXT] 45 min</a:t>
+              <a:t>In this slide we cover Attach-port REST workflow step-by-step (Ch.5). This material is covered in Ch.5 · API tables · training/experiments/virtual-networking/.</a:t>
+            </a:r>
+          </a:p>
+          <a:p/>
+          <a:p>
+            <a:r>
+              <a:t>First, regarding step 1, obtain Keystone token (or use Horizon session for API exploration). Next, regarding step 2, GET /v1/boards/ — select Active board UUID.</a:t>
+            </a:r>
+          </a:p>
+          <a:p/>
+          <a:p>
+            <a:r>
+              <a:t>By contrast, regarding step 3, GET /v1/networks/ or Horizon — obtain target Neutron network UUID. We should also consider that regarding step 4, POST /v1/boards/{BOARD_UUID}/ports/ with {"network": "NETWORK_UUID"}.</a:t>
+            </a:r>
+          </a:p>
+          <a:p/>
+          <a:p>
+            <a:r>
+              <a:t>Another key point is that regarding step 5, parse response — note VIF_name, ip, MAC for verification on board. Furthermore, regarding step 6, test connectivity from cloud VM to board overlay IP (production).</a:t>
+            </a:r>
+          </a:p>
+          <a:p/>
+          <a:p>
+            <a:r>
+              <a:t>I'll pause here for questions, then we'll continue.</a:t>
             </a:r>
           </a:p>
         </p:txBody>
@@ -2283,7 +2845,31 @@
           <a:lstStyle/>
           <a:p>
             <a:r>
-              <a:t>[EXT] 45 min</a:t>
+              <a:t>In this slide we cover MENO and Virtual Sensor Networks (Ch.5). This material is covered in Ch.5 § Network virtualization in IoT · MENO · VITRO.</a:t>
+            </a:r>
+          </a:p>
+          <a:p/>
+          <a:p>
+            <a:r>
+              <a:t>First, regarding managed ecosystem of networked objects (meno), limited cooperating devices without public IPs. Next, regarding vitro virtual sensor networking (vsn), dynamic collaboration across admin domains.</a:t>
+            </a:r>
+          </a:p>
+          <a:p/>
+          <a:p>
+            <a:r>
+              <a:t>By contrast, Applications see only the logical overlay — physical LAN boundaries become transparent. We should also consider that regarding motivates s4t nv beyond lab attach-port, smart factories, buildings, and city districts.</a:t>
+            </a:r>
+          </a:p>
+          <a:p/>
+          <a:p>
+            <a:r>
+              <a:t>Another key point is that Contrasts with exposing every sensor on a public server — most IoT apps need local cooperation. Furthermore, regarding book figure, fig:chap05:MENO — end-to-end logical network over heterogeneous physical links.</a:t>
+            </a:r>
+          </a:p>
+          <a:p/>
+          <a:p>
+            <a:r>
+              <a:t>I'll pause here for questions, then we'll continue.</a:t>
             </a:r>
           </a:p>
         </p:txBody>
@@ -5459,7 +6045,7 @@
           <a:lstStyle/>
           <a:p>
             <a:pPr>
-              <a:defRPr sz="3800" b="1">
+              <a:defRPr sz="4000" b="1">
                 <a:solidFill>
                   <a:srgbClr val="FFFFFF"/>
                 </a:solidFill>
@@ -5498,7 +6084,7 @@
               <a:spcAft>
                 <a:spcPts val="400"/>
               </a:spcAft>
-              <a:defRPr sz="2000" b="0">
+              <a:defRPr sz="2200" b="0">
                 <a:solidFill>
                   <a:srgbClr val="B2EBF2"/>
                 </a:solidFill>
@@ -5735,7 +6321,7 @@
           <a:lstStyle/>
           <a:p>
             <a:pPr algn="r">
-              <a:defRPr sz="1000" b="0">
+              <a:defRPr sz="1100" b="0">
                 <a:solidFill>
                   <a:srgbClr val="78909C"/>
                 </a:solidFill>
@@ -5771,7 +6357,7 @@
           <a:lstStyle/>
           <a:p>
             <a:pPr>
-              <a:defRPr sz="2400" b="1">
+              <a:defRPr sz="2600" b="1">
                 <a:solidFill>
                   <a:srgbClr val="0D2B45"/>
                 </a:solidFill>
@@ -5793,7 +6379,7 @@
         <p:spPr>
           <a:xfrm>
             <a:off x="502920" y="1554480"/>
-            <a:ext cx="11155680" cy="2651759"/>
+            <a:ext cx="11155680" cy="4800600"/>
           </a:xfrm>
           <a:prstGeom prst="roundRect">
             <a:avLst/>
@@ -5838,7 +6424,7 @@
         <p:spPr>
           <a:xfrm>
             <a:off x="777240" y="1673352"/>
-            <a:ext cx="10424160" cy="2468879"/>
+            <a:ext cx="10424160" cy="4572000"/>
           </a:xfrm>
           <a:prstGeom prst="rect">
             <a:avLst/>
@@ -5858,7 +6444,7 @@
               <a:spcAft>
                 <a:spcPts val="500"/>
               </a:spcAft>
-              <a:defRPr sz="1500" b="0">
+              <a:defRPr sz="1600" b="0">
                 <a:solidFill>
                   <a:srgbClr val="37474F"/>
                 </a:solidFill>
@@ -5877,7 +6463,7 @@
               <a:spcAft>
                 <a:spcPts val="500"/>
               </a:spcAft>
-              <a:defRPr sz="1500" b="0">
+              <a:defRPr sz="1600" b="0">
                 <a:solidFill>
                   <a:srgbClr val="37474F"/>
                 </a:solidFill>
@@ -5896,7 +6482,7 @@
               <a:spcAft>
                 <a:spcPts val="500"/>
               </a:spcAft>
-              <a:defRPr sz="1500" b="0">
+              <a:defRPr sz="1600" b="0">
                 <a:solidFill>
                   <a:srgbClr val="37474F"/>
                 </a:solidFill>
@@ -5915,7 +6501,7 @@
               <a:spcAft>
                 <a:spcPts val="500"/>
               </a:spcAft>
-              <a:defRPr sz="1500" b="0">
+              <a:defRPr sz="1600" b="0">
                 <a:solidFill>
                   <a:srgbClr val="37474F"/>
                 </a:solidFill>
@@ -5934,7 +6520,7 @@
               <a:spcAft>
                 <a:spcPts val="500"/>
               </a:spcAft>
-              <a:defRPr sz="1500" b="0">
+              <a:defRPr sz="1600" b="0">
                 <a:solidFill>
                   <a:srgbClr val="37474F"/>
                 </a:solidFill>
@@ -5953,7 +6539,7 @@
               <a:spcAft>
                 <a:spcPts val="500"/>
               </a:spcAft>
-              <a:defRPr sz="1500" b="0">
+              <a:defRPr sz="1600" b="0">
                 <a:solidFill>
                   <a:srgbClr val="37474F"/>
                 </a:solidFill>
@@ -6158,7 +6744,7 @@
         </p:nvSpPr>
         <p:spPr>
           <a:xfrm>
-            <a:off x="594360" y="438912"/>
+            <a:off x="594360" y="347472"/>
             <a:ext cx="10972800" cy="868680"/>
           </a:xfrm>
           <a:prstGeom prst="rect">
@@ -6194,8 +6780,8 @@
         </p:nvSpPr>
         <p:spPr>
           <a:xfrm>
-            <a:off x="2542260" y="1426464"/>
-            <a:ext cx="7107173" cy="4123944"/>
+            <a:off x="1120368" y="1298448"/>
+            <a:ext cx="9950958" cy="5733288"/>
           </a:xfrm>
           <a:prstGeom prst="roundRect">
             <a:avLst/>
@@ -6247,8 +6833,8 @@
         </p:blipFill>
         <p:spPr>
           <a:xfrm>
-            <a:off x="2615412" y="1499616"/>
-            <a:ext cx="6960869" cy="3977639"/>
+            <a:off x="1175232" y="1353312"/>
+            <a:ext cx="9841230" cy="5623560"/>
           </a:xfrm>
           <a:prstGeom prst="rect">
             <a:avLst/>
@@ -6263,7 +6849,7 @@
         </p:nvSpPr>
         <p:spPr>
           <a:xfrm>
-            <a:off x="594360" y="5687568"/>
+            <a:off x="594360" y="7168896"/>
             <a:ext cx="10972800" cy="411480"/>
           </a:xfrm>
           <a:prstGeom prst="rect">
@@ -6278,7 +6864,7 @@
           <a:lstStyle/>
           <a:p>
             <a:pPr>
-              <a:defRPr sz="1100" b="0">
+              <a:defRPr sz="1200" b="0">
                 <a:solidFill>
                   <a:srgbClr val="37474F"/>
                 </a:solidFill>
@@ -6498,7 +7084,7 @@
           <a:lstStyle/>
           <a:p>
             <a:pPr>
-              <a:defRPr sz="2800" b="1">
+              <a:defRPr sz="3000" b="1">
                 <a:solidFill>
                   <a:srgbClr val="0D2B45"/>
                 </a:solidFill>
@@ -6520,7 +7106,7 @@
         <p:spPr>
           <a:xfrm>
             <a:off x="502920" y="1344168"/>
-            <a:ext cx="11155680" cy="2331720"/>
+            <a:ext cx="11155680" cy="5010912"/>
           </a:xfrm>
           <a:prstGeom prst="roundRect">
             <a:avLst/>
@@ -6565,7 +7151,7 @@
         <p:spPr>
           <a:xfrm>
             <a:off x="777240" y="1463040"/>
-            <a:ext cx="10424160" cy="2148840"/>
+            <a:ext cx="10424160" cy="4782312"/>
           </a:xfrm>
           <a:prstGeom prst="rect">
             <a:avLst/>
@@ -6585,7 +7171,7 @@
               <a:spcAft>
                 <a:spcPts val="800"/>
               </a:spcAft>
-              <a:defRPr sz="1700" b="0">
+              <a:defRPr sz="1900" b="0">
                 <a:solidFill>
                   <a:srgbClr val="37474F"/>
                 </a:solidFill>
@@ -6604,7 +7190,7 @@
               <a:spcAft>
                 <a:spcPts val="800"/>
               </a:spcAft>
-              <a:defRPr sz="1700" b="0">
+              <a:defRPr sz="1900" b="0">
                 <a:solidFill>
                   <a:srgbClr val="37474F"/>
                 </a:solidFill>
@@ -6623,7 +7209,7 @@
               <a:spcAft>
                 <a:spcPts val="800"/>
               </a:spcAft>
-              <a:defRPr sz="1700" b="0">
+              <a:defRPr sz="1900" b="0">
                 <a:solidFill>
                   <a:srgbClr val="37474F"/>
                 </a:solidFill>
@@ -6642,7 +7228,7 @@
               <a:spcAft>
                 <a:spcPts val="800"/>
               </a:spcAft>
-              <a:defRPr sz="1700" b="0">
+              <a:defRPr sz="1900" b="0">
                 <a:solidFill>
                   <a:srgbClr val="37474F"/>
                 </a:solidFill>
@@ -6661,7 +7247,7 @@
               <a:spcAft>
                 <a:spcPts val="800"/>
               </a:spcAft>
-              <a:defRPr sz="1700" b="0">
+              <a:defRPr sz="1900" b="0">
                 <a:solidFill>
                   <a:srgbClr val="37474F"/>
                 </a:solidFill>
@@ -6898,7 +7484,7 @@
           <a:lstStyle/>
           <a:p>
             <a:pPr>
-              <a:defRPr sz="2400" b="1">
+              <a:defRPr sz="2600" b="1">
                 <a:solidFill>
                   <a:srgbClr val="0D2B45"/>
                 </a:solidFill>
@@ -6920,7 +7506,7 @@
         <p:spPr>
           <a:xfrm>
             <a:off x="502920" y="1554480"/>
-            <a:ext cx="11155680" cy="2651759"/>
+            <a:ext cx="11155680" cy="4800600"/>
           </a:xfrm>
           <a:prstGeom prst="roundRect">
             <a:avLst/>
@@ -6965,7 +7551,7 @@
         <p:spPr>
           <a:xfrm>
             <a:off x="777240" y="1673352"/>
-            <a:ext cx="10424160" cy="2468879"/>
+            <a:ext cx="10424160" cy="4572000"/>
           </a:xfrm>
           <a:prstGeom prst="rect">
             <a:avLst/>
@@ -6985,7 +7571,7 @@
               <a:spcAft>
                 <a:spcPts val="500"/>
               </a:spcAft>
-              <a:defRPr sz="1500" b="0">
+              <a:defRPr sz="1600" b="0">
                 <a:solidFill>
                   <a:srgbClr val="37474F"/>
                 </a:solidFill>
@@ -7004,7 +7590,7 @@
               <a:spcAft>
                 <a:spcPts val="500"/>
               </a:spcAft>
-              <a:defRPr sz="1500" b="0">
+              <a:defRPr sz="1600" b="0">
                 <a:solidFill>
                   <a:srgbClr val="37474F"/>
                 </a:solidFill>
@@ -7023,7 +7609,7 @@
               <a:spcAft>
                 <a:spcPts val="500"/>
               </a:spcAft>
-              <a:defRPr sz="1500" b="0">
+              <a:defRPr sz="1600" b="0">
                 <a:solidFill>
                   <a:srgbClr val="37474F"/>
                 </a:solidFill>
@@ -7042,7 +7628,7 @@
               <a:spcAft>
                 <a:spcPts val="500"/>
               </a:spcAft>
-              <a:defRPr sz="1500" b="0">
+              <a:defRPr sz="1600" b="0">
                 <a:solidFill>
                   <a:srgbClr val="37474F"/>
                 </a:solidFill>
@@ -7061,7 +7647,7 @@
               <a:spcAft>
                 <a:spcPts val="500"/>
               </a:spcAft>
-              <a:defRPr sz="1500" b="0">
+              <a:defRPr sz="1600" b="0">
                 <a:solidFill>
                   <a:srgbClr val="37474F"/>
                 </a:solidFill>
@@ -7080,7 +7666,7 @@
               <a:spcAft>
                 <a:spcPts val="500"/>
               </a:spcAft>
-              <a:defRPr sz="1500" b="0">
+              <a:defRPr sz="1600" b="0">
                 <a:solidFill>
                   <a:srgbClr val="37474F"/>
                 </a:solidFill>
@@ -7300,7 +7886,7 @@
           <a:lstStyle/>
           <a:p>
             <a:pPr algn="ctr">
-              <a:defRPr sz="3600" b="1">
+              <a:defRPr sz="3800" b="1">
                 <a:solidFill>
                   <a:srgbClr val="FFFFFF"/>
                 </a:solidFill>
@@ -7336,7 +7922,7 @@
           <a:lstStyle/>
           <a:p>
             <a:pPr algn="ctr">
-              <a:defRPr sz="2000" b="0">
+              <a:defRPr sz="2200" b="0">
                 <a:solidFill>
                   <a:srgbClr val="B2EBF2"/>
                 </a:solidFill>
@@ -7441,7 +8027,7 @@
           <a:lstStyle/>
           <a:p>
             <a:pPr>
-              <a:defRPr sz="2800" b="1">
+              <a:defRPr sz="3000" b="1">
                 <a:solidFill>
                   <a:srgbClr val="0D2B45"/>
                 </a:solidFill>
@@ -7463,7 +8049,7 @@
         <p:spPr>
           <a:xfrm>
             <a:off x="502920" y="1344168"/>
-            <a:ext cx="11155680" cy="2011680"/>
+            <a:ext cx="11155680" cy="5010912"/>
           </a:xfrm>
           <a:prstGeom prst="roundRect">
             <a:avLst/>
@@ -7508,7 +8094,7 @@
         <p:spPr>
           <a:xfrm>
             <a:off x="777240" y="1463040"/>
-            <a:ext cx="10424160" cy="1828800"/>
+            <a:ext cx="10424160" cy="4782312"/>
           </a:xfrm>
           <a:prstGeom prst="rect">
             <a:avLst/>
@@ -7528,7 +8114,7 @@
               <a:spcAft>
                 <a:spcPts val="800"/>
               </a:spcAft>
-              <a:defRPr sz="1300" b="0">
+              <a:defRPr sz="1400" b="0">
                 <a:solidFill>
                   <a:srgbClr val="0D2B45"/>
                 </a:solidFill>
@@ -7547,7 +8133,7 @@
               <a:spcAft>
                 <a:spcPts val="800"/>
               </a:spcAft>
-              <a:defRPr sz="1300" b="0">
+              <a:defRPr sz="1400" b="0">
                 <a:solidFill>
                   <a:srgbClr val="0D2B45"/>
                 </a:solidFill>
@@ -7566,7 +8152,7 @@
               <a:spcAft>
                 <a:spcPts val="800"/>
               </a:spcAft>
-              <a:defRPr sz="1300" b="0">
+              <a:defRPr sz="1400" b="0">
                 <a:solidFill>
                   <a:srgbClr val="0D2B45"/>
                 </a:solidFill>
@@ -7585,7 +8171,7 @@
               <a:spcAft>
                 <a:spcPts val="800"/>
               </a:spcAft>
-              <a:defRPr sz="1700" b="0">
+              <a:defRPr sz="1900" b="0">
                 <a:solidFill>
                   <a:srgbClr val="37474F"/>
                 </a:solidFill>
@@ -7754,7 +8340,7 @@
         </p:nvSpPr>
         <p:spPr>
           <a:xfrm>
-            <a:off x="594360" y="438912"/>
+            <a:off x="594360" y="347472"/>
             <a:ext cx="10972800" cy="868680"/>
           </a:xfrm>
           <a:prstGeom prst="rect">
@@ -7790,8 +8376,8 @@
         </p:nvSpPr>
         <p:spPr>
           <a:xfrm>
-            <a:off x="2928975" y="1426464"/>
-            <a:ext cx="6333744" cy="4123944"/>
+            <a:off x="1667103" y="1298448"/>
+            <a:ext cx="8857488" cy="5733288"/>
           </a:xfrm>
           <a:prstGeom prst="roundRect">
             <a:avLst/>
@@ -7843,8 +8429,8 @@
         </p:blipFill>
         <p:spPr>
           <a:xfrm>
-            <a:off x="3002127" y="1499616"/>
-            <a:ext cx="6187440" cy="3977639"/>
+            <a:off x="1721967" y="1353312"/>
+            <a:ext cx="8747760" cy="5623560"/>
           </a:xfrm>
           <a:prstGeom prst="rect">
             <a:avLst/>
@@ -7859,7 +8445,7 @@
         </p:nvSpPr>
         <p:spPr>
           <a:xfrm>
-            <a:off x="594360" y="5687568"/>
+            <a:off x="594360" y="7168896"/>
             <a:ext cx="10972800" cy="411480"/>
           </a:xfrm>
           <a:prstGeom prst="rect">
@@ -7874,7 +8460,7 @@
           <a:lstStyle/>
           <a:p>
             <a:pPr>
-              <a:defRPr sz="1100" b="0">
+              <a:defRPr sz="1200" b="0">
                 <a:solidFill>
                   <a:srgbClr val="37474F"/>
                 </a:solidFill>
@@ -8147,7 +8733,7 @@
           <a:lstStyle/>
           <a:p>
             <a:pPr algn="r">
-              <a:defRPr sz="1000" b="0">
+              <a:defRPr sz="1100" b="0">
                 <a:solidFill>
                   <a:srgbClr val="78909C"/>
                 </a:solidFill>
@@ -8183,7 +8769,7 @@
           <a:lstStyle/>
           <a:p>
             <a:pPr>
-              <a:defRPr sz="2400" b="1">
+              <a:defRPr sz="2600" b="1">
                 <a:solidFill>
                   <a:srgbClr val="0D2B45"/>
                 </a:solidFill>
@@ -8205,7 +8791,7 @@
         <p:spPr>
           <a:xfrm>
             <a:off x="502920" y="1554480"/>
-            <a:ext cx="11155680" cy="2651759"/>
+            <a:ext cx="11155680" cy="4800600"/>
           </a:xfrm>
           <a:prstGeom prst="roundRect">
             <a:avLst/>
@@ -8250,7 +8836,7 @@
         <p:spPr>
           <a:xfrm>
             <a:off x="777240" y="1673352"/>
-            <a:ext cx="10424160" cy="2468879"/>
+            <a:ext cx="10424160" cy="4572000"/>
           </a:xfrm>
           <a:prstGeom prst="rect">
             <a:avLst/>
@@ -8270,7 +8856,7 @@
               <a:spcAft>
                 <a:spcPts val="500"/>
               </a:spcAft>
-              <a:defRPr sz="1500" b="0">
+              <a:defRPr sz="1600" b="0">
                 <a:solidFill>
                   <a:srgbClr val="37474F"/>
                 </a:solidFill>
@@ -8289,7 +8875,7 @@
               <a:spcAft>
                 <a:spcPts val="500"/>
               </a:spcAft>
-              <a:defRPr sz="1500" b="0">
+              <a:defRPr sz="1600" b="0">
                 <a:solidFill>
                   <a:srgbClr val="37474F"/>
                 </a:solidFill>
@@ -8308,7 +8894,7 @@
               <a:spcAft>
                 <a:spcPts val="500"/>
               </a:spcAft>
-              <a:defRPr sz="1500" b="0">
+              <a:defRPr sz="1600" b="0">
                 <a:solidFill>
                   <a:srgbClr val="37474F"/>
                 </a:solidFill>
@@ -8327,7 +8913,7 @@
               <a:spcAft>
                 <a:spcPts val="500"/>
               </a:spcAft>
-              <a:defRPr sz="1500" b="0">
+              <a:defRPr sz="1600" b="0">
                 <a:solidFill>
                   <a:srgbClr val="37474F"/>
                 </a:solidFill>
@@ -8346,7 +8932,7 @@
               <a:spcAft>
                 <a:spcPts val="500"/>
               </a:spcAft>
-              <a:defRPr sz="1500" b="0">
+              <a:defRPr sz="1600" b="0">
                 <a:solidFill>
                   <a:srgbClr val="37474F"/>
                 </a:solidFill>
@@ -8365,7 +8951,7 @@
               <a:spcAft>
                 <a:spcPts val="500"/>
               </a:spcAft>
-              <a:defRPr sz="1500" b="0">
+              <a:defRPr sz="1600" b="0">
                 <a:solidFill>
                   <a:srgbClr val="37474F"/>
                 </a:solidFill>
@@ -8585,7 +9171,7 @@
           <a:lstStyle/>
           <a:p>
             <a:pPr algn="ctr">
-              <a:defRPr sz="3600" b="1">
+              <a:defRPr sz="3800" b="1">
                 <a:solidFill>
                   <a:srgbClr val="FFFFFF"/>
                 </a:solidFill>
@@ -8621,7 +9207,7 @@
           <a:lstStyle/>
           <a:p>
             <a:pPr algn="ctr">
-              <a:defRPr sz="2000" b="0">
+              <a:defRPr sz="2200" b="0">
                 <a:solidFill>
                   <a:srgbClr val="B2EBF2"/>
                 </a:solidFill>
@@ -8726,7 +9312,7 @@
           <a:lstStyle/>
           <a:p>
             <a:pPr>
-              <a:defRPr sz="2600" b="1">
+              <a:defRPr sz="2800" b="1">
                 <a:solidFill>
                   <a:srgbClr val="0D2B45"/>
                 </a:solidFill>
@@ -8784,7 +9370,7 @@
               <a:spcAft>
                 <a:spcPts val="200"/>
               </a:spcAft>
-              <a:defRPr sz="1100" b="0">
+              <a:defRPr sz="1200" b="0">
                 <a:solidFill>
                   <a:srgbClr val="E2E8F0"/>
                 </a:solidFill>
@@ -8800,7 +9386,7 @@
               <a:spcAft>
                 <a:spcPts val="200"/>
               </a:spcAft>
-              <a:defRPr sz="1100" b="0">
+              <a:defRPr sz="1200" b="0">
                 <a:solidFill>
                   <a:srgbClr val="E2E8F0"/>
                 </a:solidFill>
@@ -8816,7 +9402,7 @@
               <a:spcAft>
                 <a:spcPts val="200"/>
               </a:spcAft>
-              <a:defRPr sz="1100" b="0">
+              <a:defRPr sz="1200" b="0">
                 <a:solidFill>
                   <a:srgbClr val="E2E8F0"/>
                 </a:solidFill>
@@ -9208,7 +9794,7 @@
           <a:lstStyle/>
           <a:p>
             <a:pPr algn="ctr">
-              <a:defRPr sz="3600" b="1">
+              <a:defRPr sz="3800" b="1">
                 <a:solidFill>
                   <a:srgbClr val="FFFFFF"/>
                 </a:solidFill>
@@ -9244,7 +9830,7 @@
           <a:lstStyle/>
           <a:p>
             <a:pPr algn="ctr">
-              <a:defRPr sz="2000" b="0">
+              <a:defRPr sz="2200" b="0">
                 <a:solidFill>
                   <a:srgbClr val="B2EBF2"/>
                 </a:solidFill>
@@ -9402,7 +9988,7 @@
           <a:lstStyle/>
           <a:p>
             <a:pPr algn="r">
-              <a:defRPr sz="1000" b="0">
+              <a:defRPr sz="1100" b="0">
                 <a:solidFill>
                   <a:srgbClr val="78909C"/>
                 </a:solidFill>
@@ -9438,7 +10024,7 @@
           <a:lstStyle/>
           <a:p>
             <a:pPr>
-              <a:defRPr sz="2400" b="1">
+              <a:defRPr sz="2600" b="1">
                 <a:solidFill>
                   <a:srgbClr val="0D2B45"/>
                 </a:solidFill>
@@ -9460,7 +10046,7 @@
         <p:spPr>
           <a:xfrm>
             <a:off x="502920" y="1554480"/>
-            <a:ext cx="11155680" cy="2651759"/>
+            <a:ext cx="11155680" cy="4800600"/>
           </a:xfrm>
           <a:prstGeom prst="roundRect">
             <a:avLst/>
@@ -9505,7 +10091,7 @@
         <p:spPr>
           <a:xfrm>
             <a:off x="777240" y="1673352"/>
-            <a:ext cx="10424160" cy="2468879"/>
+            <a:ext cx="10424160" cy="4572000"/>
           </a:xfrm>
           <a:prstGeom prst="rect">
             <a:avLst/>
@@ -9525,7 +10111,7 @@
               <a:spcAft>
                 <a:spcPts val="500"/>
               </a:spcAft>
-              <a:defRPr sz="1500" b="0">
+              <a:defRPr sz="1600" b="0">
                 <a:solidFill>
                   <a:srgbClr val="37474F"/>
                 </a:solidFill>
@@ -9544,7 +10130,7 @@
               <a:spcAft>
                 <a:spcPts val="500"/>
               </a:spcAft>
-              <a:defRPr sz="1500" b="0">
+              <a:defRPr sz="1600" b="0">
                 <a:solidFill>
                   <a:srgbClr val="37474F"/>
                 </a:solidFill>
@@ -9563,7 +10149,7 @@
               <a:spcAft>
                 <a:spcPts val="500"/>
               </a:spcAft>
-              <a:defRPr sz="1500" b="0">
+              <a:defRPr sz="1600" b="0">
                 <a:solidFill>
                   <a:srgbClr val="37474F"/>
                 </a:solidFill>
@@ -9582,7 +10168,7 @@
               <a:spcAft>
                 <a:spcPts val="500"/>
               </a:spcAft>
-              <a:defRPr sz="1500" b="0">
+              <a:defRPr sz="1600" b="0">
                 <a:solidFill>
                   <a:srgbClr val="37474F"/>
                 </a:solidFill>
@@ -9601,7 +10187,7 @@
               <a:spcAft>
                 <a:spcPts val="500"/>
               </a:spcAft>
-              <a:defRPr sz="1500" b="0">
+              <a:defRPr sz="1600" b="0">
                 <a:solidFill>
                   <a:srgbClr val="37474F"/>
                 </a:solidFill>
@@ -9620,7 +10206,7 @@
               <a:spcAft>
                 <a:spcPts val="500"/>
               </a:spcAft>
-              <a:defRPr sz="1500" b="0">
+              <a:defRPr sz="1600" b="0">
                 <a:solidFill>
                   <a:srgbClr val="37474F"/>
                 </a:solidFill>
@@ -9893,7 +10479,7 @@
           <a:lstStyle/>
           <a:p>
             <a:pPr algn="r">
-              <a:defRPr sz="1000" b="0">
+              <a:defRPr sz="1100" b="0">
                 <a:solidFill>
                   <a:srgbClr val="78909C"/>
                 </a:solidFill>
@@ -9929,7 +10515,7 @@
           <a:lstStyle/>
           <a:p>
             <a:pPr>
-              <a:defRPr sz="2400" b="1">
+              <a:defRPr sz="2600" b="1">
                 <a:solidFill>
                   <a:srgbClr val="0D2B45"/>
                 </a:solidFill>
@@ -9951,7 +10537,7 @@
         <p:spPr>
           <a:xfrm>
             <a:off x="502920" y="1554480"/>
-            <a:ext cx="11155680" cy="2651759"/>
+            <a:ext cx="11155680" cy="4800600"/>
           </a:xfrm>
           <a:prstGeom prst="roundRect">
             <a:avLst/>
@@ -9996,7 +10582,7 @@
         <p:spPr>
           <a:xfrm>
             <a:off x="777240" y="1673352"/>
-            <a:ext cx="10424160" cy="2468879"/>
+            <a:ext cx="10424160" cy="4572000"/>
           </a:xfrm>
           <a:prstGeom prst="rect">
             <a:avLst/>
@@ -10016,7 +10602,7 @@
               <a:spcAft>
                 <a:spcPts val="500"/>
               </a:spcAft>
-              <a:defRPr sz="1500" b="0">
+              <a:defRPr sz="1600" b="0">
                 <a:solidFill>
                   <a:srgbClr val="37474F"/>
                 </a:solidFill>
@@ -10035,7 +10621,7 @@
               <a:spcAft>
                 <a:spcPts val="500"/>
               </a:spcAft>
-              <a:defRPr sz="1500" b="0">
+              <a:defRPr sz="1600" b="0">
                 <a:solidFill>
                   <a:srgbClr val="37474F"/>
                 </a:solidFill>
@@ -10054,7 +10640,7 @@
               <a:spcAft>
                 <a:spcPts val="500"/>
               </a:spcAft>
-              <a:defRPr sz="1500" b="0">
+              <a:defRPr sz="1600" b="0">
                 <a:solidFill>
                   <a:srgbClr val="37474F"/>
                 </a:solidFill>
@@ -10073,7 +10659,7 @@
               <a:spcAft>
                 <a:spcPts val="500"/>
               </a:spcAft>
-              <a:defRPr sz="1500" b="0">
+              <a:defRPr sz="1600" b="0">
                 <a:solidFill>
                   <a:srgbClr val="37474F"/>
                 </a:solidFill>
@@ -10092,7 +10678,7 @@
               <a:spcAft>
                 <a:spcPts val="500"/>
               </a:spcAft>
-              <a:defRPr sz="1500" b="0">
+              <a:defRPr sz="1600" b="0">
                 <a:solidFill>
                   <a:srgbClr val="37474F"/>
                 </a:solidFill>
@@ -10111,7 +10697,7 @@
               <a:spcAft>
                 <a:spcPts val="500"/>
               </a:spcAft>
-              <a:defRPr sz="1500" b="0">
+              <a:defRPr sz="1600" b="0">
                 <a:solidFill>
                   <a:srgbClr val="37474F"/>
                 </a:solidFill>
@@ -10331,7 +10917,7 @@
           <a:lstStyle/>
           <a:p>
             <a:pPr>
-              <a:defRPr sz="2800" b="1">
+              <a:defRPr sz="3000" b="1">
                 <a:solidFill>
                   <a:srgbClr val="0D2B45"/>
                 </a:solidFill>
@@ -10353,7 +10939,7 @@
         <p:spPr>
           <a:xfrm>
             <a:off x="502920" y="1344168"/>
-            <a:ext cx="11155680" cy="1371600"/>
+            <a:ext cx="11155680" cy="5010912"/>
           </a:xfrm>
           <a:prstGeom prst="roundRect">
             <a:avLst/>
@@ -10398,7 +10984,7 @@
         <p:spPr>
           <a:xfrm>
             <a:off x="777240" y="1463040"/>
-            <a:ext cx="10424160" cy="1188720"/>
+            <a:ext cx="10424160" cy="4782312"/>
           </a:xfrm>
           <a:prstGeom prst="rect">
             <a:avLst/>
@@ -10418,7 +11004,7 @@
               <a:spcAft>
                 <a:spcPts val="800"/>
               </a:spcAft>
-              <a:defRPr sz="1300" b="0">
+              <a:defRPr sz="1400" b="0">
                 <a:solidFill>
                   <a:srgbClr val="0D2B45"/>
                 </a:solidFill>
@@ -10437,7 +11023,7 @@
               <a:spcAft>
                 <a:spcPts val="800"/>
               </a:spcAft>
-              <a:defRPr sz="1700" b="0">
+              <a:defRPr sz="1900" b="0">
                 <a:solidFill>
                   <a:srgbClr val="37474F"/>
                 </a:solidFill>
@@ -10674,7 +11260,7 @@
           <a:lstStyle/>
           <a:p>
             <a:pPr algn="r">
-              <a:defRPr sz="1000" b="0">
+              <a:defRPr sz="1100" b="0">
                 <a:solidFill>
                   <a:srgbClr val="78909C"/>
                 </a:solidFill>
@@ -10710,7 +11296,7 @@
           <a:lstStyle/>
           <a:p>
             <a:pPr>
-              <a:defRPr sz="2400" b="1">
+              <a:defRPr sz="2600" b="1">
                 <a:solidFill>
                   <a:srgbClr val="0D2B45"/>
                 </a:solidFill>
@@ -10732,7 +11318,7 @@
         <p:spPr>
           <a:xfrm>
             <a:off x="502920" y="1554480"/>
-            <a:ext cx="11155680" cy="2651759"/>
+            <a:ext cx="11155680" cy="4800600"/>
           </a:xfrm>
           <a:prstGeom prst="roundRect">
             <a:avLst/>
@@ -10777,7 +11363,7 @@
         <p:spPr>
           <a:xfrm>
             <a:off x="777240" y="1673352"/>
-            <a:ext cx="10424160" cy="2468879"/>
+            <a:ext cx="10424160" cy="4572000"/>
           </a:xfrm>
           <a:prstGeom prst="rect">
             <a:avLst/>
@@ -10797,7 +11383,7 @@
               <a:spcAft>
                 <a:spcPts val="500"/>
               </a:spcAft>
-              <a:defRPr sz="1500" b="0">
+              <a:defRPr sz="1600" b="0">
                 <a:solidFill>
                   <a:srgbClr val="37474F"/>
                 </a:solidFill>
@@ -10816,7 +11402,7 @@
               <a:spcAft>
                 <a:spcPts val="500"/>
               </a:spcAft>
-              <a:defRPr sz="1500" b="0">
+              <a:defRPr sz="1600" b="0">
                 <a:solidFill>
                   <a:srgbClr val="37474F"/>
                 </a:solidFill>
@@ -10835,7 +11421,7 @@
               <a:spcAft>
                 <a:spcPts val="500"/>
               </a:spcAft>
-              <a:defRPr sz="1500" b="0">
+              <a:defRPr sz="1600" b="0">
                 <a:solidFill>
                   <a:srgbClr val="37474F"/>
                 </a:solidFill>
@@ -10854,7 +11440,7 @@
               <a:spcAft>
                 <a:spcPts val="500"/>
               </a:spcAft>
-              <a:defRPr sz="1500" b="0">
+              <a:defRPr sz="1600" b="0">
                 <a:solidFill>
                   <a:srgbClr val="37474F"/>
                 </a:solidFill>
@@ -10873,7 +11459,7 @@
               <a:spcAft>
                 <a:spcPts val="500"/>
               </a:spcAft>
-              <a:defRPr sz="1500" b="0">
+              <a:defRPr sz="1600" b="0">
                 <a:solidFill>
                   <a:srgbClr val="37474F"/>
                 </a:solidFill>
@@ -10892,7 +11478,7 @@
               <a:spcAft>
                 <a:spcPts val="500"/>
               </a:spcAft>
-              <a:defRPr sz="1500" b="0">
+              <a:defRPr sz="1600" b="0">
                 <a:solidFill>
                   <a:srgbClr val="37474F"/>
                 </a:solidFill>
@@ -11112,7 +11698,7 @@
           <a:lstStyle/>
           <a:p>
             <a:pPr algn="ctr">
-              <a:defRPr sz="3600" b="1">
+              <a:defRPr sz="3800" b="1">
                 <a:solidFill>
                   <a:srgbClr val="FFFFFF"/>
                 </a:solidFill>
@@ -11148,7 +11734,7 @@
           <a:lstStyle/>
           <a:p>
             <a:pPr algn="ctr">
-              <a:defRPr sz="2000" b="0">
+              <a:defRPr sz="2200" b="0">
                 <a:solidFill>
                   <a:srgbClr val="B2EBF2"/>
                 </a:solidFill>
@@ -11253,7 +11839,7 @@
           <a:lstStyle/>
           <a:p>
             <a:pPr>
-              <a:defRPr sz="2800" b="1">
+              <a:defRPr sz="3000" b="1">
                 <a:solidFill>
                   <a:srgbClr val="0D2B45"/>
                 </a:solidFill>
@@ -11275,7 +11861,7 @@
         <p:spPr>
           <a:xfrm>
             <a:off x="502920" y="1344168"/>
-            <a:ext cx="11155680" cy="1371600"/>
+            <a:ext cx="11155680" cy="5010912"/>
           </a:xfrm>
           <a:prstGeom prst="roundRect">
             <a:avLst/>
@@ -11320,7 +11906,7 @@
         <p:spPr>
           <a:xfrm>
             <a:off x="777240" y="1463040"/>
-            <a:ext cx="10424160" cy="1188720"/>
+            <a:ext cx="10424160" cy="4782312"/>
           </a:xfrm>
           <a:prstGeom prst="rect">
             <a:avLst/>
@@ -11340,7 +11926,7 @@
               <a:spcAft>
                 <a:spcPts val="800"/>
               </a:spcAft>
-              <a:defRPr sz="1300" b="0">
+              <a:defRPr sz="1400" b="0">
                 <a:solidFill>
                   <a:srgbClr val="0D2B45"/>
                 </a:solidFill>
@@ -11359,7 +11945,7 @@
               <a:spcAft>
                 <a:spcPts val="800"/>
               </a:spcAft>
-              <a:defRPr sz="1700" b="0">
+              <a:defRPr sz="1900" b="0">
                 <a:solidFill>
                   <a:srgbClr val="37474F"/>
                 </a:solidFill>
@@ -11596,7 +12182,7 @@
           <a:lstStyle/>
           <a:p>
             <a:pPr algn="r">
-              <a:defRPr sz="1000" b="0">
+              <a:defRPr sz="1100" b="0">
                 <a:solidFill>
                   <a:srgbClr val="78909C"/>
                 </a:solidFill>
@@ -11632,7 +12218,7 @@
           <a:lstStyle/>
           <a:p>
             <a:pPr>
-              <a:defRPr sz="2400" b="1">
+              <a:defRPr sz="2600" b="1">
                 <a:solidFill>
                   <a:srgbClr val="0D2B45"/>
                 </a:solidFill>
@@ -11654,7 +12240,7 @@
         <p:spPr>
           <a:xfrm>
             <a:off x="502920" y="1554480"/>
-            <a:ext cx="11155680" cy="2651759"/>
+            <a:ext cx="11155680" cy="4800600"/>
           </a:xfrm>
           <a:prstGeom prst="roundRect">
             <a:avLst/>
@@ -11699,7 +12285,7 @@
         <p:spPr>
           <a:xfrm>
             <a:off x="777240" y="1673352"/>
-            <a:ext cx="10424160" cy="2468879"/>
+            <a:ext cx="10424160" cy="4572000"/>
           </a:xfrm>
           <a:prstGeom prst="rect">
             <a:avLst/>
@@ -11719,7 +12305,7 @@
               <a:spcAft>
                 <a:spcPts val="500"/>
               </a:spcAft>
-              <a:defRPr sz="1500" b="0">
+              <a:defRPr sz="1600" b="0">
                 <a:solidFill>
                   <a:srgbClr val="37474F"/>
                 </a:solidFill>
@@ -11738,7 +12324,7 @@
               <a:spcAft>
                 <a:spcPts val="500"/>
               </a:spcAft>
-              <a:defRPr sz="1500" b="0">
+              <a:defRPr sz="1600" b="0">
                 <a:solidFill>
                   <a:srgbClr val="37474F"/>
                 </a:solidFill>
@@ -11757,7 +12343,7 @@
               <a:spcAft>
                 <a:spcPts val="500"/>
               </a:spcAft>
-              <a:defRPr sz="1500" b="0">
+              <a:defRPr sz="1600" b="0">
                 <a:solidFill>
                   <a:srgbClr val="37474F"/>
                 </a:solidFill>
@@ -11776,7 +12362,7 @@
               <a:spcAft>
                 <a:spcPts val="500"/>
               </a:spcAft>
-              <a:defRPr sz="1500" b="0">
+              <a:defRPr sz="1600" b="0">
                 <a:solidFill>
                   <a:srgbClr val="37474F"/>
                 </a:solidFill>
@@ -11795,7 +12381,7 @@
               <a:spcAft>
                 <a:spcPts val="500"/>
               </a:spcAft>
-              <a:defRPr sz="1500" b="0">
+              <a:defRPr sz="1600" b="0">
                 <a:solidFill>
                   <a:srgbClr val="37474F"/>
                 </a:solidFill>
@@ -11814,7 +12400,7 @@
               <a:spcAft>
                 <a:spcPts val="500"/>
               </a:spcAft>
-              <a:defRPr sz="1500" b="0">
+              <a:defRPr sz="1600" b="0">
                 <a:solidFill>
                   <a:srgbClr val="37474F"/>
                 </a:solidFill>
@@ -12034,7 +12620,7 @@
           <a:lstStyle/>
           <a:p>
             <a:pPr>
-              <a:defRPr sz="2800" b="1">
+              <a:defRPr sz="3000" b="1">
                 <a:solidFill>
                   <a:srgbClr val="0D2B45"/>
                 </a:solidFill>
@@ -12056,7 +12642,7 @@
         <p:spPr>
           <a:xfrm>
             <a:off x="502920" y="1344168"/>
-            <a:ext cx="11155680" cy="2331720"/>
+            <a:ext cx="11155680" cy="5010912"/>
           </a:xfrm>
           <a:prstGeom prst="roundRect">
             <a:avLst/>
@@ -12101,7 +12687,7 @@
         <p:spPr>
           <a:xfrm>
             <a:off x="777240" y="1463040"/>
-            <a:ext cx="10424160" cy="2148840"/>
+            <a:ext cx="10424160" cy="4782312"/>
           </a:xfrm>
           <a:prstGeom prst="rect">
             <a:avLst/>
@@ -12121,7 +12707,7 @@
               <a:spcAft>
                 <a:spcPts val="800"/>
               </a:spcAft>
-              <a:defRPr sz="1700" b="0">
+              <a:defRPr sz="1900" b="0">
                 <a:solidFill>
                   <a:srgbClr val="37474F"/>
                 </a:solidFill>
@@ -12140,7 +12726,7 @@
               <a:spcAft>
                 <a:spcPts val="800"/>
               </a:spcAft>
-              <a:defRPr sz="1700" b="0">
+              <a:defRPr sz="1900" b="0">
                 <a:solidFill>
                   <a:srgbClr val="37474F"/>
                 </a:solidFill>
@@ -12159,7 +12745,7 @@
               <a:spcAft>
                 <a:spcPts val="800"/>
               </a:spcAft>
-              <a:defRPr sz="1700" b="0">
+              <a:defRPr sz="1900" b="0">
                 <a:solidFill>
                   <a:srgbClr val="37474F"/>
                 </a:solidFill>
@@ -12178,7 +12764,7 @@
               <a:spcAft>
                 <a:spcPts val="800"/>
               </a:spcAft>
-              <a:defRPr sz="1700" b="0">
+              <a:defRPr sz="1900" b="0">
                 <a:solidFill>
                   <a:srgbClr val="37474F"/>
                 </a:solidFill>
@@ -12197,7 +12783,7 @@
               <a:spcAft>
                 <a:spcPts val="800"/>
               </a:spcAft>
-              <a:defRPr sz="1700" b="0">
+              <a:defRPr sz="1900" b="0">
                 <a:solidFill>
                   <a:srgbClr val="37474F"/>
                 </a:solidFill>
@@ -12434,7 +13020,7 @@
           <a:lstStyle/>
           <a:p>
             <a:pPr algn="r">
-              <a:defRPr sz="1000" b="0">
+              <a:defRPr sz="1100" b="0">
                 <a:solidFill>
                   <a:srgbClr val="78909C"/>
                 </a:solidFill>
@@ -12470,7 +13056,7 @@
           <a:lstStyle/>
           <a:p>
             <a:pPr>
-              <a:defRPr sz="2400" b="1">
+              <a:defRPr sz="2600" b="1">
                 <a:solidFill>
                   <a:srgbClr val="0D2B45"/>
                 </a:solidFill>
@@ -12492,7 +13078,7 @@
         <p:spPr>
           <a:xfrm>
             <a:off x="502920" y="1554480"/>
-            <a:ext cx="11155680" cy="2651759"/>
+            <a:ext cx="11155680" cy="4800600"/>
           </a:xfrm>
           <a:prstGeom prst="roundRect">
             <a:avLst/>
@@ -12537,7 +13123,7 @@
         <p:spPr>
           <a:xfrm>
             <a:off x="777240" y="1673352"/>
-            <a:ext cx="10424160" cy="2468879"/>
+            <a:ext cx="10424160" cy="4572000"/>
           </a:xfrm>
           <a:prstGeom prst="rect">
             <a:avLst/>
@@ -12557,7 +13143,7 @@
               <a:spcAft>
                 <a:spcPts val="500"/>
               </a:spcAft>
-              <a:defRPr sz="1500" b="0">
+              <a:defRPr sz="1600" b="0">
                 <a:solidFill>
                   <a:srgbClr val="37474F"/>
                 </a:solidFill>
@@ -12576,7 +13162,7 @@
               <a:spcAft>
                 <a:spcPts val="500"/>
               </a:spcAft>
-              <a:defRPr sz="1500" b="0">
+              <a:defRPr sz="1600" b="0">
                 <a:solidFill>
                   <a:srgbClr val="37474F"/>
                 </a:solidFill>
@@ -12595,7 +13181,7 @@
               <a:spcAft>
                 <a:spcPts val="500"/>
               </a:spcAft>
-              <a:defRPr sz="1500" b="0">
+              <a:defRPr sz="1600" b="0">
                 <a:solidFill>
                   <a:srgbClr val="37474F"/>
                 </a:solidFill>
@@ -12614,7 +13200,7 @@
               <a:spcAft>
                 <a:spcPts val="500"/>
               </a:spcAft>
-              <a:defRPr sz="1500" b="0">
+              <a:defRPr sz="1600" b="0">
                 <a:solidFill>
                   <a:srgbClr val="37474F"/>
                 </a:solidFill>
@@ -12633,7 +13219,7 @@
               <a:spcAft>
                 <a:spcPts val="500"/>
               </a:spcAft>
-              <a:defRPr sz="1500" b="0">
+              <a:defRPr sz="1600" b="0">
                 <a:solidFill>
                   <a:srgbClr val="37474F"/>
                 </a:solidFill>
@@ -12652,7 +13238,7 @@
               <a:spcAft>
                 <a:spcPts val="500"/>
               </a:spcAft>
-              <a:defRPr sz="1500" b="0">
+              <a:defRPr sz="1600" b="0">
                 <a:solidFill>
                   <a:srgbClr val="37474F"/>
                 </a:solidFill>
@@ -12925,7 +13511,7 @@
           <a:lstStyle/>
           <a:p>
             <a:pPr algn="r">
-              <a:defRPr sz="1000" b="0">
+              <a:defRPr sz="1100" b="0">
                 <a:solidFill>
                   <a:srgbClr val="78909C"/>
                 </a:solidFill>
@@ -12961,7 +13547,7 @@
           <a:lstStyle/>
           <a:p>
             <a:pPr>
-              <a:defRPr sz="2400" b="1">
+              <a:defRPr sz="2600" b="1">
                 <a:solidFill>
                   <a:srgbClr val="0D2B45"/>
                 </a:solidFill>
@@ -12983,7 +13569,7 @@
         <p:spPr>
           <a:xfrm>
             <a:off x="502920" y="1554480"/>
-            <a:ext cx="11155680" cy="2651759"/>
+            <a:ext cx="11155680" cy="4800600"/>
           </a:xfrm>
           <a:prstGeom prst="roundRect">
             <a:avLst/>
@@ -13028,7 +13614,7 @@
         <p:spPr>
           <a:xfrm>
             <a:off x="777240" y="1673352"/>
-            <a:ext cx="10424160" cy="2468879"/>
+            <a:ext cx="10424160" cy="4572000"/>
           </a:xfrm>
           <a:prstGeom prst="rect">
             <a:avLst/>
@@ -13048,7 +13634,7 @@
               <a:spcAft>
                 <a:spcPts val="500"/>
               </a:spcAft>
-              <a:defRPr sz="1500" b="0">
+              <a:defRPr sz="1600" b="0">
                 <a:solidFill>
                   <a:srgbClr val="37474F"/>
                 </a:solidFill>
@@ -13067,7 +13653,7 @@
               <a:spcAft>
                 <a:spcPts val="500"/>
               </a:spcAft>
-              <a:defRPr sz="1500" b="0">
+              <a:defRPr sz="1600" b="0">
                 <a:solidFill>
                   <a:srgbClr val="37474F"/>
                 </a:solidFill>
@@ -13086,7 +13672,7 @@
               <a:spcAft>
                 <a:spcPts val="500"/>
               </a:spcAft>
-              <a:defRPr sz="1500" b="0">
+              <a:defRPr sz="1600" b="0">
                 <a:solidFill>
                   <a:srgbClr val="37474F"/>
                 </a:solidFill>
@@ -13105,7 +13691,7 @@
               <a:spcAft>
                 <a:spcPts val="500"/>
               </a:spcAft>
-              <a:defRPr sz="1500" b="0">
+              <a:defRPr sz="1600" b="0">
                 <a:solidFill>
                   <a:srgbClr val="37474F"/>
                 </a:solidFill>
@@ -13124,7 +13710,7 @@
               <a:spcAft>
                 <a:spcPts val="500"/>
               </a:spcAft>
-              <a:defRPr sz="1500" b="0">
+              <a:defRPr sz="1600" b="0">
                 <a:solidFill>
                   <a:srgbClr val="37474F"/>
                 </a:solidFill>
@@ -13143,7 +13729,7 @@
               <a:spcAft>
                 <a:spcPts val="500"/>
               </a:spcAft>
-              <a:defRPr sz="1500" b="0">
+              <a:defRPr sz="1600" b="0">
                 <a:solidFill>
                   <a:srgbClr val="37474F"/>
                 </a:solidFill>
@@ -13416,7 +14002,7 @@
           <a:lstStyle/>
           <a:p>
             <a:pPr algn="r">
-              <a:defRPr sz="1000" b="0">
+              <a:defRPr sz="1100" b="0">
                 <a:solidFill>
                   <a:srgbClr val="78909C"/>
                 </a:solidFill>
@@ -13452,7 +14038,7 @@
           <a:lstStyle/>
           <a:p>
             <a:pPr>
-              <a:defRPr sz="2400" b="1">
+              <a:defRPr sz="2600" b="1">
                 <a:solidFill>
                   <a:srgbClr val="0D2B45"/>
                 </a:solidFill>
@@ -13474,7 +14060,7 @@
         <p:spPr>
           <a:xfrm>
             <a:off x="502920" y="1554480"/>
-            <a:ext cx="11155680" cy="2651759"/>
+            <a:ext cx="11155680" cy="4800600"/>
           </a:xfrm>
           <a:prstGeom prst="roundRect">
             <a:avLst/>
@@ -13519,7 +14105,7 @@
         <p:spPr>
           <a:xfrm>
             <a:off x="777240" y="1673352"/>
-            <a:ext cx="10424160" cy="2468879"/>
+            <a:ext cx="10424160" cy="4572000"/>
           </a:xfrm>
           <a:prstGeom prst="rect">
             <a:avLst/>
@@ -13539,7 +14125,7 @@
               <a:spcAft>
                 <a:spcPts val="500"/>
               </a:spcAft>
-              <a:defRPr sz="1500" b="0">
+              <a:defRPr sz="1600" b="0">
                 <a:solidFill>
                   <a:srgbClr val="37474F"/>
                 </a:solidFill>
@@ -13558,7 +14144,7 @@
               <a:spcAft>
                 <a:spcPts val="500"/>
               </a:spcAft>
-              <a:defRPr sz="1500" b="0">
+              <a:defRPr sz="1600" b="0">
                 <a:solidFill>
                   <a:srgbClr val="37474F"/>
                 </a:solidFill>
@@ -13577,7 +14163,7 @@
               <a:spcAft>
                 <a:spcPts val="500"/>
               </a:spcAft>
-              <a:defRPr sz="1500" b="0">
+              <a:defRPr sz="1600" b="0">
                 <a:solidFill>
                   <a:srgbClr val="37474F"/>
                 </a:solidFill>
@@ -13596,7 +14182,7 @@
               <a:spcAft>
                 <a:spcPts val="500"/>
               </a:spcAft>
-              <a:defRPr sz="1500" b="0">
+              <a:defRPr sz="1600" b="0">
                 <a:solidFill>
                   <a:srgbClr val="37474F"/>
                 </a:solidFill>
@@ -13615,7 +14201,7 @@
               <a:spcAft>
                 <a:spcPts val="500"/>
               </a:spcAft>
-              <a:defRPr sz="1500" b="0">
+              <a:defRPr sz="1600" b="0">
                 <a:solidFill>
                   <a:srgbClr val="37474F"/>
                 </a:solidFill>
@@ -13634,7 +14220,7 @@
               <a:spcAft>
                 <a:spcPts val="500"/>
               </a:spcAft>
-              <a:defRPr sz="1500" b="0">
+              <a:defRPr sz="1600" b="0">
                 <a:solidFill>
                   <a:srgbClr val="37474F"/>
                 </a:solidFill>
@@ -13907,7 +14493,7 @@
           <a:lstStyle/>
           <a:p>
             <a:pPr algn="r">
-              <a:defRPr sz="1000" b="0">
+              <a:defRPr sz="1100" b="0">
                 <a:solidFill>
                   <a:srgbClr val="78909C"/>
                 </a:solidFill>
@@ -13943,7 +14529,7 @@
           <a:lstStyle/>
           <a:p>
             <a:pPr>
-              <a:defRPr sz="2400" b="1">
+              <a:defRPr sz="2600" b="1">
                 <a:solidFill>
                   <a:srgbClr val="0D2B45"/>
                 </a:solidFill>
@@ -13965,7 +14551,7 @@
         <p:spPr>
           <a:xfrm>
             <a:off x="502920" y="1554480"/>
-            <a:ext cx="11155680" cy="2651759"/>
+            <a:ext cx="11155680" cy="4800600"/>
           </a:xfrm>
           <a:prstGeom prst="roundRect">
             <a:avLst/>
@@ -14010,7 +14596,7 @@
         <p:spPr>
           <a:xfrm>
             <a:off x="777240" y="1673352"/>
-            <a:ext cx="10424160" cy="2468879"/>
+            <a:ext cx="10424160" cy="4572000"/>
           </a:xfrm>
           <a:prstGeom prst="rect">
             <a:avLst/>
@@ -14030,7 +14616,7 @@
               <a:spcAft>
                 <a:spcPts val="500"/>
               </a:spcAft>
-              <a:defRPr sz="1500" b="0">
+              <a:defRPr sz="1600" b="0">
                 <a:solidFill>
                   <a:srgbClr val="37474F"/>
                 </a:solidFill>
@@ -14049,7 +14635,7 @@
               <a:spcAft>
                 <a:spcPts val="500"/>
               </a:spcAft>
-              <a:defRPr sz="1500" b="0">
+              <a:defRPr sz="1600" b="0">
                 <a:solidFill>
                   <a:srgbClr val="37474F"/>
                 </a:solidFill>
@@ -14068,7 +14654,7 @@
               <a:spcAft>
                 <a:spcPts val="500"/>
               </a:spcAft>
-              <a:defRPr sz="1500" b="0">
+              <a:defRPr sz="1600" b="0">
                 <a:solidFill>
                   <a:srgbClr val="37474F"/>
                 </a:solidFill>
@@ -14087,7 +14673,7 @@
               <a:spcAft>
                 <a:spcPts val="500"/>
               </a:spcAft>
-              <a:defRPr sz="1500" b="0">
+              <a:defRPr sz="1600" b="0">
                 <a:solidFill>
                   <a:srgbClr val="37474F"/>
                 </a:solidFill>
@@ -14106,7 +14692,7 @@
               <a:spcAft>
                 <a:spcPts val="500"/>
               </a:spcAft>
-              <a:defRPr sz="1500" b="0">
+              <a:defRPr sz="1600" b="0">
                 <a:solidFill>
                   <a:srgbClr val="37474F"/>
                 </a:solidFill>
@@ -14125,7 +14711,7 @@
               <a:spcAft>
                 <a:spcPts val="500"/>
               </a:spcAft>
-              <a:defRPr sz="1500" b="0">
+              <a:defRPr sz="1600" b="0">
                 <a:solidFill>
                   <a:srgbClr val="37474F"/>
                 </a:solidFill>
@@ -14398,7 +14984,7 @@
           <a:lstStyle/>
           <a:p>
             <a:pPr algn="r">
-              <a:defRPr sz="1000" b="0">
+              <a:defRPr sz="1100" b="0">
                 <a:solidFill>
                   <a:srgbClr val="78909C"/>
                 </a:solidFill>
@@ -14434,7 +15020,7 @@
           <a:lstStyle/>
           <a:p>
             <a:pPr>
-              <a:defRPr sz="2400" b="1">
+              <a:defRPr sz="2600" b="1">
                 <a:solidFill>
                   <a:srgbClr val="0D2B45"/>
                 </a:solidFill>
@@ -14456,7 +15042,7 @@
         <p:spPr>
           <a:xfrm>
             <a:off x="502920" y="1554480"/>
-            <a:ext cx="11155680" cy="2651759"/>
+            <a:ext cx="11155680" cy="4800600"/>
           </a:xfrm>
           <a:prstGeom prst="roundRect">
             <a:avLst/>
@@ -14501,7 +15087,7 @@
         <p:spPr>
           <a:xfrm>
             <a:off x="777240" y="1673352"/>
-            <a:ext cx="10424160" cy="2468879"/>
+            <a:ext cx="10424160" cy="4572000"/>
           </a:xfrm>
           <a:prstGeom prst="rect">
             <a:avLst/>
@@ -14521,7 +15107,7 @@
               <a:spcAft>
                 <a:spcPts val="500"/>
               </a:spcAft>
-              <a:defRPr sz="1500" b="0">
+              <a:defRPr sz="1600" b="0">
                 <a:solidFill>
                   <a:srgbClr val="37474F"/>
                 </a:solidFill>
@@ -14540,7 +15126,7 @@
               <a:spcAft>
                 <a:spcPts val="500"/>
               </a:spcAft>
-              <a:defRPr sz="1500" b="0">
+              <a:defRPr sz="1600" b="0">
                 <a:solidFill>
                   <a:srgbClr val="37474F"/>
                 </a:solidFill>
@@ -14559,7 +15145,7 @@
               <a:spcAft>
                 <a:spcPts val="500"/>
               </a:spcAft>
-              <a:defRPr sz="1500" b="0">
+              <a:defRPr sz="1600" b="0">
                 <a:solidFill>
                   <a:srgbClr val="37474F"/>
                 </a:solidFill>
@@ -14578,7 +15164,7 @@
               <a:spcAft>
                 <a:spcPts val="500"/>
               </a:spcAft>
-              <a:defRPr sz="1500" b="0">
+              <a:defRPr sz="1600" b="0">
                 <a:solidFill>
                   <a:srgbClr val="37474F"/>
                 </a:solidFill>
@@ -14597,7 +15183,7 @@
               <a:spcAft>
                 <a:spcPts val="500"/>
               </a:spcAft>
-              <a:defRPr sz="1500" b="0">
+              <a:defRPr sz="1600" b="0">
                 <a:solidFill>
                   <a:srgbClr val="37474F"/>
                 </a:solidFill>
@@ -14616,7 +15202,7 @@
               <a:spcAft>
                 <a:spcPts val="500"/>
               </a:spcAft>
-              <a:defRPr sz="1500" b="0">
+              <a:defRPr sz="1600" b="0">
                 <a:solidFill>
                   <a:srgbClr val="37474F"/>
                 </a:solidFill>
@@ -14889,7 +15475,7 @@
           <a:lstStyle/>
           <a:p>
             <a:pPr algn="r">
-              <a:defRPr sz="1000" b="0">
+              <a:defRPr sz="1100" b="0">
                 <a:solidFill>
                   <a:srgbClr val="78909C"/>
                 </a:solidFill>
@@ -14925,7 +15511,7 @@
           <a:lstStyle/>
           <a:p>
             <a:pPr>
-              <a:defRPr sz="2400" b="1">
+              <a:defRPr sz="2600" b="1">
                 <a:solidFill>
                   <a:srgbClr val="0D2B45"/>
                 </a:solidFill>
@@ -14947,7 +15533,7 @@
         <p:spPr>
           <a:xfrm>
             <a:off x="502920" y="1554480"/>
-            <a:ext cx="11155680" cy="2651759"/>
+            <a:ext cx="11155680" cy="4800600"/>
           </a:xfrm>
           <a:prstGeom prst="roundRect">
             <a:avLst/>
@@ -14992,7 +15578,7 @@
         <p:spPr>
           <a:xfrm>
             <a:off x="777240" y="1673352"/>
-            <a:ext cx="10424160" cy="2468879"/>
+            <a:ext cx="10424160" cy="4572000"/>
           </a:xfrm>
           <a:prstGeom prst="rect">
             <a:avLst/>
@@ -15012,7 +15598,7 @@
               <a:spcAft>
                 <a:spcPts val="500"/>
               </a:spcAft>
-              <a:defRPr sz="1500" b="0">
+              <a:defRPr sz="1600" b="0">
                 <a:solidFill>
                   <a:srgbClr val="37474F"/>
                 </a:solidFill>
@@ -15031,7 +15617,7 @@
               <a:spcAft>
                 <a:spcPts val="500"/>
               </a:spcAft>
-              <a:defRPr sz="1500" b="0">
+              <a:defRPr sz="1600" b="0">
                 <a:solidFill>
                   <a:srgbClr val="37474F"/>
                 </a:solidFill>
@@ -15050,7 +15636,7 @@
               <a:spcAft>
                 <a:spcPts val="500"/>
               </a:spcAft>
-              <a:defRPr sz="1500" b="0">
+              <a:defRPr sz="1600" b="0">
                 <a:solidFill>
                   <a:srgbClr val="37474F"/>
                 </a:solidFill>
@@ -15069,7 +15655,7 @@
               <a:spcAft>
                 <a:spcPts val="500"/>
               </a:spcAft>
-              <a:defRPr sz="1500" b="0">
+              <a:defRPr sz="1600" b="0">
                 <a:solidFill>
                   <a:srgbClr val="37474F"/>
                 </a:solidFill>
@@ -15088,7 +15674,7 @@
               <a:spcAft>
                 <a:spcPts val="500"/>
               </a:spcAft>
-              <a:defRPr sz="1500" b="0">
+              <a:defRPr sz="1600" b="0">
                 <a:solidFill>
                   <a:srgbClr val="37474F"/>
                 </a:solidFill>
@@ -15107,7 +15693,7 @@
               <a:spcAft>
                 <a:spcPts val="500"/>
               </a:spcAft>
-              <a:defRPr sz="1500" b="0">
+              <a:defRPr sz="1600" b="0">
                 <a:solidFill>
                   <a:srgbClr val="37474F"/>
                 </a:solidFill>
@@ -15380,7 +15966,7 @@
           <a:lstStyle/>
           <a:p>
             <a:pPr algn="r">
-              <a:defRPr sz="1000" b="0">
+              <a:defRPr sz="1100" b="0">
                 <a:solidFill>
                   <a:srgbClr val="78909C"/>
                 </a:solidFill>
@@ -15416,7 +16002,7 @@
           <a:lstStyle/>
           <a:p>
             <a:pPr>
-              <a:defRPr sz="2400" b="1">
+              <a:defRPr sz="2600" b="1">
                 <a:solidFill>
                   <a:srgbClr val="0D2B45"/>
                 </a:solidFill>
@@ -15438,7 +16024,7 @@
         <p:spPr>
           <a:xfrm>
             <a:off x="502920" y="1554480"/>
-            <a:ext cx="11155680" cy="2651759"/>
+            <a:ext cx="11155680" cy="4800600"/>
           </a:xfrm>
           <a:prstGeom prst="roundRect">
             <a:avLst/>
@@ -15483,7 +16069,7 @@
         <p:spPr>
           <a:xfrm>
             <a:off x="777240" y="1673352"/>
-            <a:ext cx="10424160" cy="2468879"/>
+            <a:ext cx="10424160" cy="4572000"/>
           </a:xfrm>
           <a:prstGeom prst="rect">
             <a:avLst/>
@@ -15503,7 +16089,7 @@
               <a:spcAft>
                 <a:spcPts val="500"/>
               </a:spcAft>
-              <a:defRPr sz="1500" b="0">
+              <a:defRPr sz="1600" b="0">
                 <a:solidFill>
                   <a:srgbClr val="37474F"/>
                 </a:solidFill>
@@ -15522,7 +16108,7 @@
               <a:spcAft>
                 <a:spcPts val="500"/>
               </a:spcAft>
-              <a:defRPr sz="1500" b="0">
+              <a:defRPr sz="1600" b="0">
                 <a:solidFill>
                   <a:srgbClr val="37474F"/>
                 </a:solidFill>
@@ -15541,7 +16127,7 @@
               <a:spcAft>
                 <a:spcPts val="500"/>
               </a:spcAft>
-              <a:defRPr sz="1500" b="0">
+              <a:defRPr sz="1600" b="0">
                 <a:solidFill>
                   <a:srgbClr val="37474F"/>
                 </a:solidFill>
@@ -15560,7 +16146,7 @@
               <a:spcAft>
                 <a:spcPts val="500"/>
               </a:spcAft>
-              <a:defRPr sz="1500" b="0">
+              <a:defRPr sz="1600" b="0">
                 <a:solidFill>
                   <a:srgbClr val="37474F"/>
                 </a:solidFill>
@@ -15579,7 +16165,7 @@
               <a:spcAft>
                 <a:spcPts val="500"/>
               </a:spcAft>
-              <a:defRPr sz="1500" b="0">
+              <a:defRPr sz="1600" b="0">
                 <a:solidFill>
                   <a:srgbClr val="37474F"/>
                 </a:solidFill>
@@ -15598,7 +16184,7 @@
               <a:spcAft>
                 <a:spcPts val="500"/>
               </a:spcAft>
-              <a:defRPr sz="1500" b="0">
+              <a:defRPr sz="1600" b="0">
                 <a:solidFill>
                   <a:srgbClr val="37474F"/>
                 </a:solidFill>
